--- a/deck/ThaparPatiala_TEAM_Submission_ppt.pptx
+++ b/deck/ThaparPatiala_TEAM_Submission_ppt.pptx
@@ -10974,7 +10974,7 @@
                 <a:ea typeface="Cambria" pitchFamily="34" charset="-122"/>
                 <a:cs typeface="Cambria" pitchFamily="34" charset="-120"/>
               </a:rPr>
-              <a:t>18/18</a:t>
+              <a:t>21/21</a:t>
             </a:r>
             <a:endParaRPr lang="en-US" sz="4600" dirty="0"/>
           </a:p>
@@ -11069,7 +11069,7 @@
                 <a:ea typeface="Cambria" pitchFamily="34" charset="-122"/>
                 <a:cs typeface="Cambria" pitchFamily="34" charset="-120"/>
               </a:rPr>
-              <a:t>107.8</a:t>
+              <a:t>108.1</a:t>
             </a:r>
             <a:endParaRPr lang="en-US" sz="4600" dirty="0"/>
           </a:p>
@@ -11259,7 +11259,7 @@
                 <a:ea typeface="Cambria" pitchFamily="34" charset="-122"/>
                 <a:cs typeface="Cambria" pitchFamily="34" charset="-120"/>
               </a:rPr>
-              <a:t>233</a:t>
+              <a:t>242</a:t>
             </a:r>
             <a:endParaRPr lang="en-US" sz="4600" dirty="0"/>
           </a:p>
@@ -12258,7 +12258,7 @@
                 <a:ea typeface="Calibri" pitchFamily="34" charset="-122"/>
                 <a:cs typeface="Calibri" pitchFamily="34" charset="-120"/>
               </a:rPr>
-              <a:t>9 scenarios</a:t>
+              <a:t>12 scenarios</a:t>
             </a:r>
             <a:endParaRPr lang="en-US" sz="1100" dirty="0"/>
           </a:p>
@@ -12297,7 +12297,7 @@
                 <a:ea typeface="Calibri" pitchFamily="34" charset="-122"/>
                 <a:cs typeface="Calibri" pitchFamily="34" charset="-120"/>
               </a:rPr>
-              <a:t>110.6</a:t>
+              <a:t>110.4</a:t>
             </a:r>
             <a:endParaRPr lang="en-US" sz="1300" dirty="0"/>
           </a:p>
@@ -12624,7 +12624,7 @@
                 <a:ea typeface="Calibri" pitchFamily="34" charset="-122"/>
                 <a:cs typeface="Calibri" pitchFamily="34" charset="-120"/>
               </a:rPr>
-              <a:t>Suite mix: 50% text / 28% audio / 22% visual, matching the published set.</a:t>
+              <a:t>21 scenarios: 57% text / 24% audio / 19% visual.</a:t>
             </a:r>
             <a:endParaRPr lang="en-US" sz="1050" dirty="0"/>
           </a:p>
@@ -12776,7 +12776,7 @@
                 <a:ea typeface="Calibri" pitchFamily="34" charset="-122"/>
                 <a:cs typeface="Calibri" pitchFamily="34" charset="-120"/>
               </a:rPr>
-              <a:t>The hidden set is ~60 scenarios of “edge cases and adversarial timing”. Passing the eighteen we wrote proves little — they are the cases we thought of. So the fuzzer jitters timestamps, scales tool latency, moves commit points, collapses events onto identical timestamps, injects faults and truncates sessions — then asserts only invariants, never expectations.</a:t>
+              <a:t>The hidden set is ~60 scenarios of “edge cases and adversarial timing”. Passing the twenty-one we wrote proves little — they are the cases we thought of. So the fuzzer jitters timestamps, scales tool latency, moves commit points, collapses events onto identical timestamps, injects faults and truncates sessions — then asserts only invariants, never expectations.</a:t>
             </a:r>
             <a:endParaRPr lang="en-US" sz="1500" dirty="0"/>
           </a:p>

--- a/deck/ThaparPatiala_TEAM_Submission_ppt.pptx
+++ b/deck/ThaparPatiala_TEAM_Submission_ppt.pptx
@@ -10974,7 +10974,7 @@
                 <a:ea typeface="Cambria" pitchFamily="34" charset="-122"/>
                 <a:cs typeface="Cambria" pitchFamily="34" charset="-120"/>
               </a:rPr>
-              <a:t>21/21</a:t>
+              <a:t>22/22</a:t>
             </a:r>
             <a:endParaRPr lang="en-US" sz="4600" dirty="0"/>
           </a:p>
@@ -11069,7 +11069,7 @@
                 <a:ea typeface="Cambria" pitchFamily="34" charset="-122"/>
                 <a:cs typeface="Cambria" pitchFamily="34" charset="-120"/>
               </a:rPr>
-              <a:t>108.1</a:t>
+              <a:t>109.5</a:t>
             </a:r>
             <a:endParaRPr lang="en-US" sz="4600" dirty="0"/>
           </a:p>
@@ -11164,7 +11164,7 @@
                 <a:ea typeface="Cambria" pitchFamily="34" charset="-122"/>
                 <a:cs typeface="Cambria" pitchFamily="34" charset="-120"/>
               </a:rPr>
-              <a:t>4500</a:t>
+              <a:t>1980</a:t>
             </a:r>
             <a:endParaRPr lang="en-US" sz="4600" dirty="0"/>
           </a:p>
@@ -11259,7 +11259,7 @@
                 <a:ea typeface="Cambria" pitchFamily="34" charset="-122"/>
                 <a:cs typeface="Cambria" pitchFamily="34" charset="-120"/>
               </a:rPr>
-              <a:t>242</a:t>
+              <a:t>254</a:t>
             </a:r>
             <a:endParaRPr lang="en-US" sz="4600" dirty="0"/>
           </a:p>
@@ -12258,7 +12258,7 @@
                 <a:ea typeface="Calibri" pitchFamily="34" charset="-122"/>
                 <a:cs typeface="Calibri" pitchFamily="34" charset="-120"/>
               </a:rPr>
-              <a:t>12 scenarios</a:t>
+              <a:t>13 scenarios</a:t>
             </a:r>
             <a:endParaRPr lang="en-US" sz="1100" dirty="0"/>
           </a:p>
@@ -12441,7 +12441,7 @@
                 <a:ea typeface="Calibri" pitchFamily="34" charset="-122"/>
                 <a:cs typeface="Calibri" pitchFamily="34" charset="-120"/>
               </a:rPr>
-              <a:t>104.0</a:t>
+              <a:t>108.0</a:t>
             </a:r>
             <a:endParaRPr lang="en-US" sz="1300" dirty="0"/>
           </a:p>
@@ -12585,7 +12585,7 @@
                 <a:ea typeface="Calibri" pitchFamily="34" charset="-122"/>
                 <a:cs typeface="Calibri" pitchFamily="34" charset="-120"/>
               </a:rPr>
-              <a:t>106.2</a:t>
+              <a:t>108.8</a:t>
             </a:r>
             <a:endParaRPr lang="en-US" sz="1300" dirty="0"/>
           </a:p>
@@ -12624,7 +12624,7 @@
                 <a:ea typeface="Calibri" pitchFamily="34" charset="-122"/>
                 <a:cs typeface="Calibri" pitchFamily="34" charset="-120"/>
               </a:rPr>
-              <a:t>21 scenarios: 57% text / 24% audio / 19% visual.</a:t>
+              <a:t>22 scenarios: 59% text / 23% audio / 18% visual.</a:t>
             </a:r>
             <a:endParaRPr lang="en-US" sz="1050" dirty="0"/>
           </a:p>
@@ -12776,7 +12776,7 @@
                 <a:ea typeface="Calibri" pitchFamily="34" charset="-122"/>
                 <a:cs typeface="Calibri" pitchFamily="34" charset="-120"/>
               </a:rPr>
-              <a:t>The hidden set is ~60 scenarios of “edge cases and adversarial timing”. Passing the twenty-one we wrote proves little — they are the cases we thought of. So the fuzzer jitters timestamps, scales tool latency, moves commit points, collapses events onto identical timestamps, injects faults and truncates sessions — then asserts only invariants, never expectations.</a:t>
+              <a:t>The hidden set is ~60 scenarios of “edge cases and adversarial timing”. Passing the twenty-two we wrote proves little — they are the cases we thought of. So the fuzzer jitters timestamps, scales tool latency, moves commit points, collapses events onto identical timestamps, injects faults and truncates sessions — then asserts only invariants, never expectations.</a:t>
             </a:r>
             <a:endParaRPr lang="en-US" sz="1500" dirty="0"/>
           </a:p>
@@ -13573,7 +13573,7 @@
                 <a:ea typeface="Calibri" pitchFamily="34" charset="-122"/>
                 <a:cs typeface="Calibri" pitchFamily="34" charset="-120"/>
               </a:rPr>
-              <a:t>4500 / 4500 held, at ±1400 ms jitter.</a:t>
+              <a:t>Every run held, across thousands of schedules.</a:t>
             </a:r>
             <a:endParaRPr lang="en-US" sz="1300" dirty="0"/>
           </a:p>

--- a/deck/ThaparPatiala_TEAM_Submission_ppt.pptx
+++ b/deck/ThaparPatiala_TEAM_Submission_ppt.pptx
@@ -10974,7 +10974,7 @@
                 <a:ea typeface="Cambria" pitchFamily="34" charset="-122"/>
                 <a:cs typeface="Cambria" pitchFamily="34" charset="-120"/>
               </a:rPr>
-              <a:t>22/22</a:t>
+              <a:t>29/29</a:t>
             </a:r>
             <a:endParaRPr lang="en-US" sz="4600" dirty="0"/>
           </a:p>
@@ -11069,7 +11069,7 @@
                 <a:ea typeface="Cambria" pitchFamily="34" charset="-122"/>
                 <a:cs typeface="Cambria" pitchFamily="34" charset="-120"/>
               </a:rPr>
-              <a:t>109.5</a:t>
+              <a:t>109.2</a:t>
             </a:r>
             <a:endParaRPr lang="en-US" sz="4600" dirty="0"/>
           </a:p>
@@ -11259,7 +11259,7 @@
                 <a:ea typeface="Cambria" pitchFamily="34" charset="-122"/>
                 <a:cs typeface="Cambria" pitchFamily="34" charset="-120"/>
               </a:rPr>
-              <a:t>254</a:t>
+              <a:t>275</a:t>
             </a:r>
             <a:endParaRPr lang="en-US" sz="4600" dirty="0"/>
           </a:p>
@@ -12258,7 +12258,7 @@
                 <a:ea typeface="Calibri" pitchFamily="34" charset="-122"/>
                 <a:cs typeface="Calibri" pitchFamily="34" charset="-120"/>
               </a:rPr>
-              <a:t>13 scenarios</a:t>
+              <a:t>16 scenarios</a:t>
             </a:r>
             <a:endParaRPr lang="en-US" sz="1100" dirty="0"/>
           </a:p>
@@ -12297,7 +12297,7 @@
                 <a:ea typeface="Calibri" pitchFamily="34" charset="-122"/>
                 <a:cs typeface="Calibri" pitchFamily="34" charset="-120"/>
               </a:rPr>
-              <a:t>110.4</a:t>
+              <a:t>110.1</a:t>
             </a:r>
             <a:endParaRPr lang="en-US" sz="1300" dirty="0"/>
           </a:p>
@@ -12402,7 +12402,7 @@
                 <a:ea typeface="Calibri" pitchFamily="34" charset="-122"/>
                 <a:cs typeface="Calibri" pitchFamily="34" charset="-120"/>
               </a:rPr>
-              <a:t>5 scenarios</a:t>
+              <a:t>7 scenarios</a:t>
             </a:r>
             <a:endParaRPr lang="en-US" sz="1100" dirty="0"/>
           </a:p>
@@ -12441,7 +12441,7 @@
                 <a:ea typeface="Calibri" pitchFamily="34" charset="-122"/>
                 <a:cs typeface="Calibri" pitchFamily="34" charset="-120"/>
               </a:rPr>
-              <a:t>108.0</a:t>
+              <a:t>107.1</a:t>
             </a:r>
             <a:endParaRPr lang="en-US" sz="1300" dirty="0"/>
           </a:p>
@@ -12546,7 +12546,7 @@
                 <a:ea typeface="Calibri" pitchFamily="34" charset="-122"/>
                 <a:cs typeface="Calibri" pitchFamily="34" charset="-120"/>
               </a:rPr>
-              <a:t>4 scenarios</a:t>
+              <a:t>6 scenarios</a:t>
             </a:r>
             <a:endParaRPr lang="en-US" sz="1100" dirty="0"/>
           </a:p>
@@ -12585,7 +12585,7 @@
                 <a:ea typeface="Calibri" pitchFamily="34" charset="-122"/>
                 <a:cs typeface="Calibri" pitchFamily="34" charset="-120"/>
               </a:rPr>
-              <a:t>108.8</a:t>
+              <a:t>109.2</a:t>
             </a:r>
             <a:endParaRPr lang="en-US" sz="1300" dirty="0"/>
           </a:p>
@@ -12624,7 +12624,7 @@
                 <a:ea typeface="Calibri" pitchFamily="34" charset="-122"/>
                 <a:cs typeface="Calibri" pitchFamily="34" charset="-120"/>
               </a:rPr>
-              <a:t>22 scenarios: 59% text / 23% audio / 18% visual.</a:t>
+              <a:t>29 scenarios: 55% text / 24% audio / 21% visual.</a:t>
             </a:r>
             <a:endParaRPr lang="en-US" sz="1050" dirty="0"/>
           </a:p>
@@ -12776,7 +12776,7 @@
                 <a:ea typeface="Calibri" pitchFamily="34" charset="-122"/>
                 <a:cs typeface="Calibri" pitchFamily="34" charset="-120"/>
               </a:rPr>
-              <a:t>The hidden set is ~60 scenarios of “edge cases and adversarial timing”. Passing the twenty-two we wrote proves little — they are the cases we thought of. So the fuzzer jitters timestamps, scales tool latency, moves commit points, collapses events onto identical timestamps, injects faults and truncates sessions — then asserts only invariants, never expectations.</a:t>
+              <a:t>The hidden set is ~60 scenarios of “edge cases and adversarial timing”. Passing the twenty-nine we wrote proves little — they are the cases we thought of. So the fuzzer jitters timestamps, scales tool latency, moves commit points, collapses events onto identical timestamps, injects faults and truncates sessions — then asserts only invariants, never expectations.</a:t>
             </a:r>
             <a:endParaRPr lang="en-US" sz="1500" dirty="0"/>
           </a:p>

--- a/deck/ThaparPatiala_TEAM_Submission_ppt.pptx
+++ b/deck/ThaparPatiala_TEAM_Submission_ppt.pptx
@@ -10974,7 +10974,7 @@
                 <a:ea typeface="Cambria" pitchFamily="34" charset="-122"/>
                 <a:cs typeface="Cambria" pitchFamily="34" charset="-120"/>
               </a:rPr>
-              <a:t>29/29</a:t>
+              <a:t>30/30</a:t>
             </a:r>
             <a:endParaRPr lang="en-US" sz="4600" dirty="0"/>
           </a:p>
@@ -11259,7 +11259,7 @@
                 <a:ea typeface="Cambria" pitchFamily="34" charset="-122"/>
                 <a:cs typeface="Cambria" pitchFamily="34" charset="-120"/>
               </a:rPr>
-              <a:t>275</a:t>
+              <a:t>304</a:t>
             </a:r>
             <a:endParaRPr lang="en-US" sz="4600" dirty="0"/>
           </a:p>
@@ -12624,7 +12624,7 @@
                 <a:ea typeface="Calibri" pitchFamily="34" charset="-122"/>
                 <a:cs typeface="Calibri" pitchFamily="34" charset="-120"/>
               </a:rPr>
-              <a:t>29 scenarios: 55% text / 24% audio / 21% visual.</a:t>
+              <a:t>30 scenarios: 53% text / 23% audio / 23% visual.</a:t>
             </a:r>
             <a:endParaRPr lang="en-US" sz="1050" dirty="0"/>
           </a:p>
@@ -12776,7 +12776,7 @@
                 <a:ea typeface="Calibri" pitchFamily="34" charset="-122"/>
                 <a:cs typeface="Calibri" pitchFamily="34" charset="-120"/>
               </a:rPr>
-              <a:t>The hidden set is ~60 scenarios of “edge cases and adversarial timing”. Passing the twenty-nine we wrote proves little — they are the cases we thought of. So the fuzzer jitters timestamps, scales tool latency, moves commit points, collapses events onto identical timestamps, injects faults and truncates sessions — then asserts only invariants, never expectations.</a:t>
+              <a:t>The hidden set is ~60 scenarios of “edge cases and adversarial timing”. Passing the thirty we wrote proves little — they are the cases we thought of. So the fuzzer jitters timestamps, scales tool latency, moves commit points, collapses events onto identical timestamps, injects faults and truncates sessions — then asserts only invariants, never expectations.</a:t>
             </a:r>
             <a:endParaRPr lang="en-US" sz="1500" dirty="0"/>
           </a:p>

--- a/deck/ThaparPatiala_TEAM_Submission_ppt.pptx
+++ b/deck/ThaparPatiala_TEAM_Submission_ppt.pptx
@@ -11259,7 +11259,7 @@
                 <a:ea typeface="Cambria" pitchFamily="34" charset="-122"/>
                 <a:cs typeface="Cambria" pitchFamily="34" charset="-120"/>
               </a:rPr>
-              <a:t>304</a:t>
+              <a:t>348</a:t>
             </a:r>
             <a:endParaRPr lang="en-US" sz="4600" dirty="0"/>
           </a:p>

--- a/deck/ThaparPatiala_TEAM_Submission_ppt.pptx
+++ b/deck/ThaparPatiala_TEAM_Submission_ppt.pptx
@@ -3833,27 +3833,6 @@
                 <a:ea typeface="Calibri" pitchFamily="34" charset="-122"/>
                 <a:cs typeface="Calibri" pitchFamily="34" charset="-120"/>
               </a:rPr>
-              <a:t>Docker — reproducible build</a:t>
-            </a:r>
-            <a:endParaRPr lang="en-US" sz="1150" dirty="0"/>
-          </a:p>
-          <a:p>
-            <a:pPr marL="342900" indent="-342900">
-              <a:spcAft>
-                <a:spcPts val="700"/>
-              </a:spcAft>
-              <a:buSzPct val="100000"/>
-              <a:buChar char="•"/>
-            </a:pPr>
-            <a:r>
-              <a:rPr lang="en-US" sz="1150" dirty="0">
-                <a:solidFill>
-                  <a:srgbClr val="8B949E"/>
-                </a:solidFill>
-                <a:latin typeface="Calibri" pitchFamily="34" charset="0"/>
-                <a:ea typeface="Calibri" pitchFamily="34" charset="-122"/>
-                <a:cs typeface="Calibri" pitchFamily="34" charset="-120"/>
-              </a:rPr>
               <a:t>Node + pptxgenjs — this deck</a:t>
             </a:r>
             <a:endParaRPr lang="en-US" sz="1150" dirty="0"/>
